--- a/src/main/resources/static/image/default/skill.pptx
+++ b/src/main/resources/static/image/default/skill.pptx
@@ -242,7 +242,7 @@
           <a:p>
             <a:fld id="{0E085FA6-3BB9-47BA-8D81-299A75D1B58A}" type="datetimeFigureOut">
               <a:rPr kumimoji="1" lang="ja-JP" altLang="en-US" smtClean="0"/>
-              <a:t>2025/8/25</a:t>
+              <a:t>2026/3/5</a:t>
             </a:fld>
             <a:endParaRPr kumimoji="1" lang="ja-JP" altLang="en-US"/>
           </a:p>
@@ -442,7 +442,7 @@
           <a:p>
             <a:fld id="{0E085FA6-3BB9-47BA-8D81-299A75D1B58A}" type="datetimeFigureOut">
               <a:rPr kumimoji="1" lang="ja-JP" altLang="en-US" smtClean="0"/>
-              <a:t>2025/8/25</a:t>
+              <a:t>2026/3/5</a:t>
             </a:fld>
             <a:endParaRPr kumimoji="1" lang="ja-JP" altLang="en-US"/>
           </a:p>
@@ -652,7 +652,7 @@
           <a:p>
             <a:fld id="{0E085FA6-3BB9-47BA-8D81-299A75D1B58A}" type="datetimeFigureOut">
               <a:rPr kumimoji="1" lang="ja-JP" altLang="en-US" smtClean="0"/>
-              <a:t>2025/8/25</a:t>
+              <a:t>2026/3/5</a:t>
             </a:fld>
             <a:endParaRPr kumimoji="1" lang="ja-JP" altLang="en-US"/>
           </a:p>
@@ -852,7 +852,7 @@
           <a:p>
             <a:fld id="{0E085FA6-3BB9-47BA-8D81-299A75D1B58A}" type="datetimeFigureOut">
               <a:rPr kumimoji="1" lang="ja-JP" altLang="en-US" smtClean="0"/>
-              <a:t>2025/8/25</a:t>
+              <a:t>2026/3/5</a:t>
             </a:fld>
             <a:endParaRPr kumimoji="1" lang="ja-JP" altLang="en-US"/>
           </a:p>
@@ -1097,7 +1097,7 @@
           <a:p>
             <a:fld id="{0E085FA6-3BB9-47BA-8D81-299A75D1B58A}" type="datetimeFigureOut">
               <a:rPr kumimoji="1" lang="ja-JP" altLang="en-US" smtClean="0"/>
-              <a:t>2025/8/25</a:t>
+              <a:t>2026/3/5</a:t>
             </a:fld>
             <a:endParaRPr kumimoji="1" lang="ja-JP" altLang="en-US"/>
           </a:p>
@@ -1390,7 +1390,7 @@
           <a:p>
             <a:fld id="{0E085FA6-3BB9-47BA-8D81-299A75D1B58A}" type="datetimeFigureOut">
               <a:rPr kumimoji="1" lang="ja-JP" altLang="en-US" smtClean="0"/>
-              <a:t>2025/8/25</a:t>
+              <a:t>2026/3/5</a:t>
             </a:fld>
             <a:endParaRPr kumimoji="1" lang="ja-JP" altLang="en-US"/>
           </a:p>
@@ -1818,7 +1818,7 @@
           <a:p>
             <a:fld id="{0E085FA6-3BB9-47BA-8D81-299A75D1B58A}" type="datetimeFigureOut">
               <a:rPr kumimoji="1" lang="ja-JP" altLang="en-US" smtClean="0"/>
-              <a:t>2025/8/25</a:t>
+              <a:t>2026/3/5</a:t>
             </a:fld>
             <a:endParaRPr kumimoji="1" lang="ja-JP" altLang="en-US"/>
           </a:p>
@@ -1935,7 +1935,7 @@
           <a:p>
             <a:fld id="{0E085FA6-3BB9-47BA-8D81-299A75D1B58A}" type="datetimeFigureOut">
               <a:rPr kumimoji="1" lang="ja-JP" altLang="en-US" smtClean="0"/>
-              <a:t>2025/8/25</a:t>
+              <a:t>2026/3/5</a:t>
             </a:fld>
             <a:endParaRPr kumimoji="1" lang="ja-JP" altLang="en-US"/>
           </a:p>
@@ -2030,7 +2030,7 @@
           <a:p>
             <a:fld id="{0E085FA6-3BB9-47BA-8D81-299A75D1B58A}" type="datetimeFigureOut">
               <a:rPr kumimoji="1" lang="ja-JP" altLang="en-US" smtClean="0"/>
-              <a:t>2025/8/25</a:t>
+              <a:t>2026/3/5</a:t>
             </a:fld>
             <a:endParaRPr kumimoji="1" lang="ja-JP" altLang="en-US"/>
           </a:p>
@@ -2337,7 +2337,7 @@
           <a:p>
             <a:fld id="{0E085FA6-3BB9-47BA-8D81-299A75D1B58A}" type="datetimeFigureOut">
               <a:rPr kumimoji="1" lang="ja-JP" altLang="en-US" smtClean="0"/>
-              <a:t>2025/8/25</a:t>
+              <a:t>2026/3/5</a:t>
             </a:fld>
             <a:endParaRPr kumimoji="1" lang="ja-JP" altLang="en-US"/>
           </a:p>
@@ -2589,7 +2589,7 @@
           <a:p>
             <a:fld id="{0E085FA6-3BB9-47BA-8D81-299A75D1B58A}" type="datetimeFigureOut">
               <a:rPr kumimoji="1" lang="ja-JP" altLang="en-US" smtClean="0"/>
-              <a:t>2025/8/25</a:t>
+              <a:t>2026/3/5</a:t>
             </a:fld>
             <a:endParaRPr kumimoji="1" lang="ja-JP" altLang="en-US"/>
           </a:p>
@@ -2832,7 +2832,7 @@
           <a:p>
             <a:fld id="{0E085FA6-3BB9-47BA-8D81-299A75D1B58A}" type="datetimeFigureOut">
               <a:rPr kumimoji="1" lang="ja-JP" altLang="en-US" smtClean="0"/>
-              <a:t>2025/8/25</a:t>
+              <a:t>2026/3/5</a:t>
             </a:fld>
             <a:endParaRPr kumimoji="1" lang="ja-JP" altLang="en-US"/>
           </a:p>
@@ -3251,9 +3251,7 @@
           <a:prstGeom prst="rect">
             <a:avLst/>
           </a:prstGeom>
-          <a:solidFill>
-            <a:schemeClr val="bg1"/>
-          </a:solidFill>
+          <a:noFill/>
           <a:ln>
             <a:solidFill>
               <a:schemeClr val="tx1"/>
@@ -3299,9 +3297,7 @@
           <a:prstGeom prst="rect">
             <a:avLst/>
           </a:prstGeom>
-          <a:solidFill>
-            <a:schemeClr val="bg1"/>
-          </a:solidFill>
+          <a:noFill/>
           <a:ln>
             <a:solidFill>
               <a:schemeClr val="tx1"/>
@@ -3347,9 +3343,7 @@
           <a:prstGeom prst="rect">
             <a:avLst/>
           </a:prstGeom>
-          <a:solidFill>
-            <a:schemeClr val="bg1"/>
-          </a:solidFill>
+          <a:noFill/>
           <a:ln>
             <a:solidFill>
               <a:schemeClr val="tx1"/>
@@ -3395,9 +3389,7 @@
           <a:prstGeom prst="rect">
             <a:avLst/>
           </a:prstGeom>
-          <a:solidFill>
-            <a:schemeClr val="bg1"/>
-          </a:solidFill>
+          <a:noFill/>
           <a:ln>
             <a:solidFill>
               <a:schemeClr val="tx1"/>
@@ -3443,9 +3435,7 @@
           <a:prstGeom prst="rect">
             <a:avLst/>
           </a:prstGeom>
-          <a:solidFill>
-            <a:schemeClr val="bg1"/>
-          </a:solidFill>
+          <a:noFill/>
           <a:ln>
             <a:solidFill>
               <a:schemeClr val="tx1"/>
@@ -3491,9 +3481,7 @@
           <a:prstGeom prst="rect">
             <a:avLst/>
           </a:prstGeom>
-          <a:solidFill>
-            <a:schemeClr val="bg1"/>
-          </a:solidFill>
+          <a:noFill/>
           <a:ln>
             <a:solidFill>
               <a:schemeClr val="tx1"/>
@@ -3539,9 +3527,7 @@
           <a:prstGeom prst="rect">
             <a:avLst/>
           </a:prstGeom>
-          <a:solidFill>
-            <a:schemeClr val="bg1"/>
-          </a:solidFill>
+          <a:noFill/>
           <a:ln>
             <a:solidFill>
               <a:schemeClr val="tx1"/>
@@ -3587,9 +3573,7 @@
           <a:prstGeom prst="rect">
             <a:avLst/>
           </a:prstGeom>
-          <a:solidFill>
-            <a:schemeClr val="bg1"/>
-          </a:solidFill>
+          <a:noFill/>
           <a:ln>
             <a:solidFill>
               <a:schemeClr val="tx1"/>
@@ -3635,9 +3619,7 @@
           <a:prstGeom prst="rect">
             <a:avLst/>
           </a:prstGeom>
-          <a:solidFill>
-            <a:schemeClr val="bg1"/>
-          </a:solidFill>
+          <a:noFill/>
           <a:ln>
             <a:solidFill>
               <a:schemeClr val="tx1"/>
@@ -3683,9 +3665,7 @@
           <a:prstGeom prst="rect">
             <a:avLst/>
           </a:prstGeom>
-          <a:solidFill>
-            <a:schemeClr val="bg1"/>
-          </a:solidFill>
+          <a:noFill/>
           <a:ln>
             <a:solidFill>
               <a:schemeClr val="tx1"/>
@@ -3731,9 +3711,7 @@
           <a:prstGeom prst="rect">
             <a:avLst/>
           </a:prstGeom>
-          <a:solidFill>
-            <a:schemeClr val="bg1"/>
-          </a:solidFill>
+          <a:noFill/>
           <a:ln>
             <a:solidFill>
               <a:schemeClr val="tx1"/>
@@ -3779,9 +3757,7 @@
           <a:prstGeom prst="rect">
             <a:avLst/>
           </a:prstGeom>
-          <a:solidFill>
-            <a:schemeClr val="bg1"/>
-          </a:solidFill>
+          <a:noFill/>
           <a:ln>
             <a:solidFill>
               <a:schemeClr val="tx1"/>
@@ -3827,9 +3803,7 @@
           <a:prstGeom prst="rect">
             <a:avLst/>
           </a:prstGeom>
-          <a:solidFill>
-            <a:schemeClr val="bg1"/>
-          </a:solidFill>
+          <a:noFill/>
           <a:ln>
             <a:solidFill>
               <a:schemeClr val="tx1"/>
@@ -3875,9 +3849,7 @@
           <a:prstGeom prst="rect">
             <a:avLst/>
           </a:prstGeom>
-          <a:solidFill>
-            <a:schemeClr val="bg1"/>
-          </a:solidFill>
+          <a:noFill/>
           <a:ln>
             <a:solidFill>
               <a:schemeClr val="tx1"/>
@@ -3923,9 +3895,7 @@
           <a:prstGeom prst="rect">
             <a:avLst/>
           </a:prstGeom>
-          <a:solidFill>
-            <a:schemeClr val="bg1"/>
-          </a:solidFill>
+          <a:noFill/>
           <a:ln>
             <a:solidFill>
               <a:schemeClr val="tx1"/>
@@ -4013,9 +3983,7 @@
           <a:prstGeom prst="rect">
             <a:avLst/>
           </a:prstGeom>
-          <a:solidFill>
-            <a:schemeClr val="bg1"/>
-          </a:solidFill>
+          <a:noFill/>
           <a:ln>
             <a:solidFill>
               <a:schemeClr val="tx1"/>
@@ -4067,9 +4035,7 @@
           <a:prstGeom prst="rect">
             <a:avLst/>
           </a:prstGeom>
-          <a:solidFill>
-            <a:schemeClr val="bg1"/>
-          </a:solidFill>
+          <a:noFill/>
           <a:ln>
             <a:solidFill>
               <a:schemeClr val="tx1"/>
@@ -4121,9 +4087,7 @@
           <a:prstGeom prst="rect">
             <a:avLst/>
           </a:prstGeom>
-          <a:solidFill>
-            <a:schemeClr val="bg1"/>
-          </a:solidFill>
+          <a:noFill/>
           <a:ln>
             <a:solidFill>
               <a:schemeClr val="tx1"/>
@@ -4175,9 +4139,7 @@
           <a:prstGeom prst="rect">
             <a:avLst/>
           </a:prstGeom>
-          <a:solidFill>
-            <a:schemeClr val="bg1"/>
-          </a:solidFill>
+          <a:noFill/>
           <a:ln>
             <a:solidFill>
               <a:schemeClr val="tx1"/>
@@ -4229,9 +4191,7 @@
           <a:prstGeom prst="rect">
             <a:avLst/>
           </a:prstGeom>
-          <a:solidFill>
-            <a:schemeClr val="bg1"/>
-          </a:solidFill>
+          <a:noFill/>
           <a:ln>
             <a:solidFill>
               <a:schemeClr val="tx1"/>
@@ -4283,9 +4243,7 @@
           <a:prstGeom prst="rect">
             <a:avLst/>
           </a:prstGeom>
-          <a:solidFill>
-            <a:schemeClr val="bg1"/>
-          </a:solidFill>
+          <a:noFill/>
           <a:ln>
             <a:solidFill>
               <a:schemeClr val="tx1"/>
@@ -4337,9 +4295,7 @@
           <a:prstGeom prst="rect">
             <a:avLst/>
           </a:prstGeom>
-          <a:solidFill>
-            <a:schemeClr val="bg1"/>
-          </a:solidFill>
+          <a:noFill/>
           <a:ln>
             <a:solidFill>
               <a:schemeClr val="tx1"/>
@@ -4391,9 +4347,7 @@
           <a:prstGeom prst="rect">
             <a:avLst/>
           </a:prstGeom>
-          <a:solidFill>
-            <a:schemeClr val="bg1"/>
-          </a:solidFill>
+          <a:noFill/>
           <a:ln>
             <a:solidFill>
               <a:schemeClr val="tx1"/>
@@ -4445,9 +4399,7 @@
           <a:prstGeom prst="rect">
             <a:avLst/>
           </a:prstGeom>
-          <a:solidFill>
-            <a:schemeClr val="bg1"/>
-          </a:solidFill>
+          <a:noFill/>
           <a:ln>
             <a:solidFill>
               <a:schemeClr val="tx1"/>
@@ -4499,9 +4451,7 @@
           <a:prstGeom prst="rect">
             <a:avLst/>
           </a:prstGeom>
-          <a:solidFill>
-            <a:schemeClr val="bg1"/>
-          </a:solidFill>
+          <a:noFill/>
           <a:ln>
             <a:solidFill>
               <a:schemeClr val="tx1"/>
@@ -4553,9 +4503,7 @@
           <a:prstGeom prst="rect">
             <a:avLst/>
           </a:prstGeom>
-          <a:solidFill>
-            <a:schemeClr val="bg1"/>
-          </a:solidFill>
+          <a:noFill/>
           <a:ln>
             <a:solidFill>
               <a:schemeClr val="tx1"/>
@@ -4607,9 +4555,7 @@
           <a:prstGeom prst="rect">
             <a:avLst/>
           </a:prstGeom>
-          <a:solidFill>
-            <a:schemeClr val="bg1"/>
-          </a:solidFill>
+          <a:noFill/>
           <a:ln>
             <a:solidFill>
               <a:schemeClr val="tx1"/>
@@ -4661,9 +4607,7 @@
           <a:prstGeom prst="rect">
             <a:avLst/>
           </a:prstGeom>
-          <a:solidFill>
-            <a:schemeClr val="bg1"/>
-          </a:solidFill>
+          <a:noFill/>
           <a:ln>
             <a:solidFill>
               <a:schemeClr val="tx1"/>
@@ -4715,9 +4659,7 @@
           <a:prstGeom prst="rect">
             <a:avLst/>
           </a:prstGeom>
-          <a:solidFill>
-            <a:schemeClr val="bg1"/>
-          </a:solidFill>
+          <a:noFill/>
           <a:ln>
             <a:solidFill>
               <a:schemeClr val="tx1"/>
@@ -4769,9 +4711,7 @@
           <a:prstGeom prst="rect">
             <a:avLst/>
           </a:prstGeom>
-          <a:solidFill>
-            <a:schemeClr val="bg1"/>
-          </a:solidFill>
+          <a:noFill/>
           <a:ln>
             <a:solidFill>
               <a:schemeClr val="tx1"/>
